--- a/presentation/Recommender Presentation.pptx
+++ b/presentation/Recommender Presentation.pptx
@@ -220,7 +220,7 @@
           <a:p>
             <a:fld id="{A7FFF3D5-063D-4CC1-8349-88AB7FEFD430}" type="datetimeFigureOut">
               <a:rPr lang="en-GB" smtClean="0"/>
-              <a:t>28/07/2026</a:t>
+              <a:t>29/07/2026</a:t>
             </a:fld>
             <a:endParaRPr lang="en-GB"/>
           </a:p>
@@ -721,7 +721,7 @@
           <a:p>
             <a:fld id="{68BD01A5-178E-42BA-8DE3-1E83FF417D73}" type="datetimeFigureOut">
               <a:rPr lang="en-GB" smtClean="0"/>
-              <a:t>28/07/2026</a:t>
+              <a:t>29/07/2026</a:t>
             </a:fld>
             <a:endParaRPr lang="en-GB"/>
           </a:p>
@@ -921,7 +921,7 @@
           <a:p>
             <a:fld id="{68BD01A5-178E-42BA-8DE3-1E83FF417D73}" type="datetimeFigureOut">
               <a:rPr lang="en-GB" smtClean="0"/>
-              <a:t>28/07/2026</a:t>
+              <a:t>29/07/2026</a:t>
             </a:fld>
             <a:endParaRPr lang="en-GB"/>
           </a:p>
@@ -1131,7 +1131,7 @@
           <a:p>
             <a:fld id="{68BD01A5-178E-42BA-8DE3-1E83FF417D73}" type="datetimeFigureOut">
               <a:rPr lang="en-GB" smtClean="0"/>
-              <a:t>28/07/2026</a:t>
+              <a:t>29/07/2026</a:t>
             </a:fld>
             <a:endParaRPr lang="en-GB"/>
           </a:p>
@@ -1331,7 +1331,7 @@
           <a:p>
             <a:fld id="{68BD01A5-178E-42BA-8DE3-1E83FF417D73}" type="datetimeFigureOut">
               <a:rPr lang="en-GB" smtClean="0"/>
-              <a:t>28/07/2026</a:t>
+              <a:t>29/07/2026</a:t>
             </a:fld>
             <a:endParaRPr lang="en-GB"/>
           </a:p>
@@ -1607,7 +1607,7 @@
           <a:p>
             <a:fld id="{68BD01A5-178E-42BA-8DE3-1E83FF417D73}" type="datetimeFigureOut">
               <a:rPr lang="en-GB" smtClean="0"/>
-              <a:t>28/07/2026</a:t>
+              <a:t>29/07/2026</a:t>
             </a:fld>
             <a:endParaRPr lang="en-GB"/>
           </a:p>
@@ -1875,7 +1875,7 @@
           <a:p>
             <a:fld id="{68BD01A5-178E-42BA-8DE3-1E83FF417D73}" type="datetimeFigureOut">
               <a:rPr lang="en-GB" smtClean="0"/>
-              <a:t>28/07/2026</a:t>
+              <a:t>29/07/2026</a:t>
             </a:fld>
             <a:endParaRPr lang="en-GB"/>
           </a:p>
@@ -2290,7 +2290,7 @@
           <a:p>
             <a:fld id="{68BD01A5-178E-42BA-8DE3-1E83FF417D73}" type="datetimeFigureOut">
               <a:rPr lang="en-GB" smtClean="0"/>
-              <a:t>28/07/2026</a:t>
+              <a:t>29/07/2026</a:t>
             </a:fld>
             <a:endParaRPr lang="en-GB"/>
           </a:p>
@@ -2432,7 +2432,7 @@
           <a:p>
             <a:fld id="{68BD01A5-178E-42BA-8DE3-1E83FF417D73}" type="datetimeFigureOut">
               <a:rPr lang="en-GB" smtClean="0"/>
-              <a:t>28/07/2026</a:t>
+              <a:t>29/07/2026</a:t>
             </a:fld>
             <a:endParaRPr lang="en-GB"/>
           </a:p>
@@ -2545,7 +2545,7 @@
           <a:p>
             <a:fld id="{68BD01A5-178E-42BA-8DE3-1E83FF417D73}" type="datetimeFigureOut">
               <a:rPr lang="en-GB" smtClean="0"/>
-              <a:t>28/07/2026</a:t>
+              <a:t>29/07/2026</a:t>
             </a:fld>
             <a:endParaRPr lang="en-GB"/>
           </a:p>
@@ -2858,7 +2858,7 @@
           <a:p>
             <a:fld id="{68BD01A5-178E-42BA-8DE3-1E83FF417D73}" type="datetimeFigureOut">
               <a:rPr lang="en-GB" smtClean="0"/>
-              <a:t>28/07/2026</a:t>
+              <a:t>29/07/2026</a:t>
             </a:fld>
             <a:endParaRPr lang="en-GB"/>
           </a:p>
@@ -3147,7 +3147,7 @@
           <a:p>
             <a:fld id="{68BD01A5-178E-42BA-8DE3-1E83FF417D73}" type="datetimeFigureOut">
               <a:rPr lang="en-GB" smtClean="0"/>
-              <a:t>28/07/2026</a:t>
+              <a:t>29/07/2026</a:t>
             </a:fld>
             <a:endParaRPr lang="en-GB"/>
           </a:p>
@@ -3390,7 +3390,7 @@
           <a:p>
             <a:fld id="{68BD01A5-178E-42BA-8DE3-1E83FF417D73}" type="datetimeFigureOut">
               <a:rPr lang="en-GB" smtClean="0"/>
-              <a:t>28/07/2026</a:t>
+              <a:t>29/07/2026</a:t>
             </a:fld>
             <a:endParaRPr lang="en-GB"/>
           </a:p>
@@ -4110,7 +4110,7 @@
             <p:ph idx="1"/>
             <p:extLst>
               <p:ext uri="{D42A27DB-BD31-4B8C-83A1-F6EECF244321}">
-                <p14:modId xmlns:p14="http://schemas.microsoft.com/office/powerpoint/2010/main" val="453308814"/>
+                <p14:modId xmlns:p14="http://schemas.microsoft.com/office/powerpoint/2010/main" val="1025256072"/>
               </p:ext>
             </p:extLst>
           </p:nvPr>
@@ -5600,60 +5600,7 @@
                       </a:pPr>
                       <a:r>
                         <a:rPr lang="en-GB" sz="2600" dirty="0"/>
-                        <a:t>0.795</a:t>
-                      </a:r>
-                    </a:p>
-                  </a:txBody>
-                  <a:tcPr anchor="ctr">
-                    <a:lnL w="12700" cap="flat" cmpd="sng" algn="ctr">
-                      <a:solidFill>
-                        <a:schemeClr val="tx1"/>
-                      </a:solidFill>
-                      <a:prstDash val="solid"/>
-                      <a:round/>
-                      <a:headEnd type="none" w="med" len="med"/>
-                      <a:tailEnd type="none" w="med" len="med"/>
-                    </a:lnL>
-                    <a:lnR w="12700" cap="flat" cmpd="sng" algn="ctr">
-                      <a:solidFill>
-                        <a:schemeClr val="tx1"/>
-                      </a:solidFill>
-                      <a:prstDash val="solid"/>
-                      <a:round/>
-                      <a:headEnd type="none" w="med" len="med"/>
-                      <a:tailEnd type="none" w="med" len="med"/>
-                    </a:lnR>
-                    <a:lnT w="12700" cap="flat" cmpd="sng" algn="ctr">
-                      <a:solidFill>
-                        <a:schemeClr val="tx1"/>
-                      </a:solidFill>
-                      <a:prstDash val="solid"/>
-                      <a:round/>
-                      <a:headEnd type="none" w="med" len="med"/>
-                      <a:tailEnd type="none" w="med" len="med"/>
-                    </a:lnT>
-                    <a:lnB w="12700" cap="flat" cmpd="sng" algn="ctr">
-                      <a:solidFill>
-                        <a:schemeClr val="tx1"/>
-                      </a:solidFill>
-                      <a:prstDash val="solid"/>
-                      <a:round/>
-                      <a:headEnd type="none" w="med" len="med"/>
-                      <a:tailEnd type="none" w="med" len="med"/>
-                    </a:lnB>
-                  </a:tcPr>
-                </a:tc>
-                <a:tc>
-                  <a:txBody>
-                    <a:bodyPr/>
-                    <a:lstStyle/>
-                    <a:p>
-                      <a:pPr>
-                        <a:buNone/>
-                      </a:pPr>
-                      <a:r>
-                        <a:rPr lang="en-GB" sz="2600"/>
-                        <a:t>0.598</a:t>
+                        <a:t>0.788</a:t>
                       </a:r>
                     </a:p>
                   </a:txBody>
@@ -5706,7 +5653,7 @@
                       </a:pPr>
                       <a:r>
                         <a:rPr lang="en-GB" sz="2600" dirty="0"/>
-                        <a:t>0.819</a:t>
+                        <a:t>0.591</a:t>
                       </a:r>
                     </a:p>
                   </a:txBody>
@@ -5759,7 +5706,7 @@
                       </a:pPr>
                       <a:r>
                         <a:rPr lang="en-GB" sz="2600" dirty="0"/>
-                        <a:t>0.332</a:t>
+                        <a:t>0.823</a:t>
                       </a:r>
                     </a:p>
                   </a:txBody>
@@ -5812,7 +5759,60 @@
                       </a:pPr>
                       <a:r>
                         <a:rPr lang="en-GB" sz="2600" dirty="0"/>
-                        <a:t>0.881</a:t>
+                        <a:t>0.333</a:t>
+                      </a:r>
+                    </a:p>
+                  </a:txBody>
+                  <a:tcPr anchor="ctr">
+                    <a:lnL w="12700" cap="flat" cmpd="sng" algn="ctr">
+                      <a:solidFill>
+                        <a:schemeClr val="tx1"/>
+                      </a:solidFill>
+                      <a:prstDash val="solid"/>
+                      <a:round/>
+                      <a:headEnd type="none" w="med" len="med"/>
+                      <a:tailEnd type="none" w="med" len="med"/>
+                    </a:lnL>
+                    <a:lnR w="12700" cap="flat" cmpd="sng" algn="ctr">
+                      <a:solidFill>
+                        <a:schemeClr val="tx1"/>
+                      </a:solidFill>
+                      <a:prstDash val="solid"/>
+                      <a:round/>
+                      <a:headEnd type="none" w="med" len="med"/>
+                      <a:tailEnd type="none" w="med" len="med"/>
+                    </a:lnR>
+                    <a:lnT w="12700" cap="flat" cmpd="sng" algn="ctr">
+                      <a:solidFill>
+                        <a:schemeClr val="tx1"/>
+                      </a:solidFill>
+                      <a:prstDash val="solid"/>
+                      <a:round/>
+                      <a:headEnd type="none" w="med" len="med"/>
+                      <a:tailEnd type="none" w="med" len="med"/>
+                    </a:lnT>
+                    <a:lnB w="12700" cap="flat" cmpd="sng" algn="ctr">
+                      <a:solidFill>
+                        <a:schemeClr val="tx1"/>
+                      </a:solidFill>
+                      <a:prstDash val="solid"/>
+                      <a:round/>
+                      <a:headEnd type="none" w="med" len="med"/>
+                      <a:tailEnd type="none" w="med" len="med"/>
+                    </a:lnB>
+                  </a:tcPr>
+                </a:tc>
+                <a:tc>
+                  <a:txBody>
+                    <a:bodyPr/>
+                    <a:lstStyle/>
+                    <a:p>
+                      <a:pPr>
+                        <a:buNone/>
+                      </a:pPr>
+                      <a:r>
+                        <a:rPr lang="en-GB" sz="2600" dirty="0"/>
+                        <a:t>0.883</a:t>
                       </a:r>
                     </a:p>
                   </a:txBody>
